--- a/뉴스핌_월간_자산배분전략_2026년5월.pptx
+++ b/뉴스핌_월간_자산배분전략_2026년5월.pptx
@@ -3782,7 +3782,7 @@
         <p:spPr>
           <a:xfrm>
             <a:off x="731520" y="2194560"/>
-            <a:ext cx="10058400" cy="548640"/>
+            <a:ext cx="10058400" cy="295466"/>
           </a:xfrm>
           <a:prstGeom prst="rect">
             <a:avLst/>
@@ -3801,7 +3801,7 @@
               </a:lnSpc>
             </a:pPr>
             <a:r>
-              <a:rPr sz="1400" b="1">
+              <a:rPr sz="1400" b="1" dirty="0">
                 <a:solidFill>
                   <a:srgbClr val="C7D4ED"/>
                 </a:solidFill>
@@ -3809,8 +3809,38 @@
                 <a:ea typeface="KoPubWorld돋움체 Bold"/>
                 <a:cs typeface="KoPubWorld돋움체 Bold"/>
               </a:rPr>
-              <a:t>2026년 5월</a:t>
-            </a:r>
+              <a:t>2026년 </a:t>
+            </a:r>
+            <a:r>
+              <a:rPr lang="en-US" sz="1400" b="1" dirty="0" smtClean="0">
+                <a:solidFill>
+                  <a:srgbClr val="C7D4ED"/>
+                </a:solidFill>
+                <a:latin typeface="KoPubWorld돋움체 Bold"/>
+                <a:ea typeface="KoPubWorld돋움체 Bold"/>
+                <a:cs typeface="KoPubWorld돋움체 Bold"/>
+              </a:rPr>
+              <a:t>6</a:t>
+            </a:r>
+            <a:r>
+              <a:rPr sz="1400" b="1" dirty="0" smtClean="0">
+                <a:solidFill>
+                  <a:srgbClr val="C7D4ED"/>
+                </a:solidFill>
+                <a:latin typeface="KoPubWorld돋움체 Bold"/>
+                <a:ea typeface="KoPubWorld돋움체 Bold"/>
+                <a:cs typeface="KoPubWorld돋움체 Bold"/>
+              </a:rPr>
+              <a:t>월</a:t>
+            </a:r>
+            <a:endParaRPr sz="1400" b="1" dirty="0">
+              <a:solidFill>
+                <a:srgbClr val="C7D4ED"/>
+              </a:solidFill>
+              <a:latin typeface="KoPubWorld돋움체 Bold"/>
+              <a:ea typeface="KoPubWorld돋움체 Bold"/>
+              <a:cs typeface="KoPubWorld돋움체 Bold"/>
+            </a:endParaRPr>
           </a:p>
         </p:txBody>
       </p:sp>
@@ -6167,10 +6197,10 @@
                 <a:ea typeface="KoPubWorld돋움체 Medium"/>
                 <a:cs typeface="KoPubWorld돋움체 Medium"/>
               </a:rPr>
-              <a:t>2026.05.</a:t>
-            </a:r>
-            <a:r>
-              <a:rPr lang="en-US" sz="900" b="0" smtClean="0">
+              <a:t>2026.0</a:t>
+            </a:r>
+            <a:r>
+              <a:rPr lang="en-US" sz="900" b="0" dirty="0" smtClean="0">
                 <a:solidFill>
                   <a:srgbClr val="C7D4ED"/>
                 </a:solidFill>
@@ -6178,10 +6208,32 @@
                 <a:ea typeface="KoPubWorld돋움체 Medium"/>
                 <a:cs typeface="KoPubWorld돋움체 Medium"/>
               </a:rPr>
+              <a:t>6</a:t>
+            </a:r>
+            <a:r>
+              <a:rPr sz="900" b="0" dirty="0" smtClean="0">
+                <a:solidFill>
+                  <a:srgbClr val="C7D4ED"/>
+                </a:solidFill>
+                <a:latin typeface="KoPubWorld돋움체 Medium"/>
+                <a:ea typeface="KoPubWorld돋움체 Medium"/>
+                <a:cs typeface="KoPubWorld돋움체 Medium"/>
+              </a:rPr>
+              <a:t>.</a:t>
+            </a:r>
+            <a:r>
+              <a:rPr lang="en-US" sz="900" b="0" dirty="0" smtClean="0">
+                <a:solidFill>
+                  <a:srgbClr val="C7D4ED"/>
+                </a:solidFill>
+                <a:latin typeface="KoPubWorld돋움체 Medium"/>
+                <a:ea typeface="KoPubWorld돋움체 Medium"/>
+                <a:cs typeface="KoPubWorld돋움체 Medium"/>
+              </a:rPr>
               <a:t>11</a:t>
             </a:r>
             <a:r>
-              <a:rPr sz="900" b="0" smtClean="0">
+              <a:rPr sz="900" b="0" dirty="0" smtClean="0">
                 <a:solidFill>
                   <a:srgbClr val="C7D4ED"/>
                 </a:solidFill>
@@ -6189,10 +6241,10 @@
                 <a:ea typeface="KoPubWorld돋움체 Medium"/>
                 <a:cs typeface="KoPubWorld돋움체 Medium"/>
               </a:rPr>
-              <a:t>~2027.05.</a:t>
-            </a:r>
-            <a:r>
-              <a:rPr lang="en-US" sz="900" b="0" smtClean="0">
+              <a:t>~2027.0</a:t>
+            </a:r>
+            <a:r>
+              <a:rPr lang="en-US" sz="900" b="0" dirty="0" smtClean="0">
                 <a:solidFill>
                   <a:srgbClr val="C7D4ED"/>
                 </a:solidFill>
@@ -6200,10 +6252,32 @@
                 <a:ea typeface="KoPubWorld돋움체 Medium"/>
                 <a:cs typeface="KoPubWorld돋움체 Medium"/>
               </a:rPr>
+              <a:t>6</a:t>
+            </a:r>
+            <a:r>
+              <a:rPr sz="900" b="0" dirty="0" smtClean="0">
+                <a:solidFill>
+                  <a:srgbClr val="C7D4ED"/>
+                </a:solidFill>
+                <a:latin typeface="KoPubWorld돋움체 Medium"/>
+                <a:ea typeface="KoPubWorld돋움체 Medium"/>
+                <a:cs typeface="KoPubWorld돋움체 Medium"/>
+              </a:rPr>
+              <a:t>.</a:t>
+            </a:r>
+            <a:r>
+              <a:rPr lang="en-US" sz="900" b="0" dirty="0" smtClean="0">
+                <a:solidFill>
+                  <a:srgbClr val="C7D4ED"/>
+                </a:solidFill>
+                <a:latin typeface="KoPubWorld돋움체 Medium"/>
+                <a:ea typeface="KoPubWorld돋움체 Medium"/>
+                <a:cs typeface="KoPubWorld돋움체 Medium"/>
+              </a:rPr>
               <a:t>10</a:t>
             </a:r>
             <a:r>
-              <a:rPr sz="900" b="0" smtClean="0">
+              <a:rPr sz="900" b="0" dirty="0" smtClean="0">
                 <a:solidFill>
                   <a:srgbClr val="C7D4ED"/>
                 </a:solidFill>
@@ -6653,8 +6727,8 @@
         </p:nvSpPr>
         <p:spPr>
           <a:xfrm>
-            <a:off x="10058400" y="530352"/>
-            <a:ext cx="2011680" cy="320040"/>
+            <a:off x="10058400" y="561106"/>
+            <a:ext cx="2011680" cy="258532"/>
           </a:xfrm>
           <a:prstGeom prst="rect">
             <a:avLst/>
@@ -6673,7 +6747,7 @@
               </a:lnSpc>
             </a:pPr>
             <a:r>
-              <a:rPr sz="1200" b="1">
+              <a:rPr sz="1200" b="1" dirty="0" smtClean="0">
                 <a:solidFill>
                   <a:srgbClr val="191877"/>
                 </a:solidFill>
@@ -6681,7 +6755,40 @@
                 <a:ea typeface="KoPubWorld돋움체 Bold"/>
                 <a:cs typeface="KoPubWorld돋움체 Bold"/>
               </a:rPr>
-              <a:t>2026.05  ·  11/14</a:t>
+              <a:t>2026.0</a:t>
+            </a:r>
+            <a:r>
+              <a:rPr lang="en-US" sz="1200" b="1" dirty="0" smtClean="0">
+                <a:solidFill>
+                  <a:srgbClr val="191877"/>
+                </a:solidFill>
+                <a:latin typeface="KoPubWorld돋움체 Bold"/>
+                <a:ea typeface="KoPubWorld돋움체 Bold"/>
+                <a:cs typeface="KoPubWorld돋움체 Bold"/>
+              </a:rPr>
+              <a:t>6</a:t>
+            </a:r>
+            <a:r>
+              <a:rPr sz="1200" b="1" dirty="0" smtClean="0">
+                <a:solidFill>
+                  <a:srgbClr val="191877"/>
+                </a:solidFill>
+                <a:latin typeface="KoPubWorld돋움체 Bold"/>
+                <a:ea typeface="KoPubWorld돋움체 Bold"/>
+                <a:cs typeface="KoPubWorld돋움체 Bold"/>
+              </a:rPr>
+              <a:t>  </a:t>
+            </a:r>
+            <a:r>
+              <a:rPr sz="1200" b="1" dirty="0">
+                <a:solidFill>
+                  <a:srgbClr val="191877"/>
+                </a:solidFill>
+                <a:latin typeface="KoPubWorld돋움체 Bold"/>
+                <a:ea typeface="KoPubWorld돋움체 Bold"/>
+                <a:cs typeface="KoPubWorld돋움체 Bold"/>
+              </a:rPr>
+              <a:t>·  11/14</a:t>
             </a:r>
           </a:p>
         </p:txBody>
@@ -9340,8 +9447,8 @@
         </p:nvSpPr>
         <p:spPr>
           <a:xfrm>
-            <a:off x="10058400" y="530352"/>
-            <a:ext cx="2011680" cy="320040"/>
+            <a:off x="10058400" y="561106"/>
+            <a:ext cx="2011680" cy="258532"/>
           </a:xfrm>
           <a:prstGeom prst="rect">
             <a:avLst/>
@@ -9360,7 +9467,7 @@
               </a:lnSpc>
             </a:pPr>
             <a:r>
-              <a:rPr sz="1200" b="1">
+              <a:rPr sz="1200" b="1" dirty="0" smtClean="0">
                 <a:solidFill>
                   <a:srgbClr val="191877"/>
                 </a:solidFill>
@@ -9368,7 +9475,40 @@
                 <a:ea typeface="KoPubWorld돋움체 Bold"/>
                 <a:cs typeface="KoPubWorld돋움체 Bold"/>
               </a:rPr>
-              <a:t>2026.05  ·  12/14</a:t>
+              <a:t>2026.0</a:t>
+            </a:r>
+            <a:r>
+              <a:rPr lang="en-US" sz="1200" b="1" dirty="0" smtClean="0">
+                <a:solidFill>
+                  <a:srgbClr val="191877"/>
+                </a:solidFill>
+                <a:latin typeface="KoPubWorld돋움체 Bold"/>
+                <a:ea typeface="KoPubWorld돋움체 Bold"/>
+                <a:cs typeface="KoPubWorld돋움체 Bold"/>
+              </a:rPr>
+              <a:t>6</a:t>
+            </a:r>
+            <a:r>
+              <a:rPr sz="1200" b="1" dirty="0" smtClean="0">
+                <a:solidFill>
+                  <a:srgbClr val="191877"/>
+                </a:solidFill>
+                <a:latin typeface="KoPubWorld돋움체 Bold"/>
+                <a:ea typeface="KoPubWorld돋움체 Bold"/>
+                <a:cs typeface="KoPubWorld돋움체 Bold"/>
+              </a:rPr>
+              <a:t>  </a:t>
+            </a:r>
+            <a:r>
+              <a:rPr sz="1200" b="1" dirty="0">
+                <a:solidFill>
+                  <a:srgbClr val="191877"/>
+                </a:solidFill>
+                <a:latin typeface="KoPubWorld돋움체 Bold"/>
+                <a:ea typeface="KoPubWorld돋움체 Bold"/>
+                <a:cs typeface="KoPubWorld돋움체 Bold"/>
+              </a:rPr>
+              <a:t>·  12/14</a:t>
             </a:r>
           </a:p>
         </p:txBody>
@@ -16887,7 +17027,7 @@
               </a:lnSpc>
             </a:pPr>
             <a:r>
-              <a:rPr sz="1800" b="1">
+              <a:rPr sz="1800" b="1" dirty="0" err="1">
                 <a:solidFill>
                   <a:srgbClr val="191877"/>
                 </a:solidFill>
@@ -16895,8 +17035,60 @@
                 <a:ea typeface="KoPubWorld돋움체 Bold"/>
                 <a:cs typeface="KoPubWorld돋움체 Bold"/>
               </a:rPr>
-              <a:t>퇴직연금 포트폴리오 솔루션</a:t>
-            </a:r>
+              <a:t>퇴직연금</a:t>
+            </a:r>
+            <a:r>
+              <a:rPr sz="1800" b="1" dirty="0">
+                <a:solidFill>
+                  <a:srgbClr val="191877"/>
+                </a:solidFill>
+                <a:latin typeface="KoPubWorld돋움체 Bold"/>
+                <a:ea typeface="KoPubWorld돋움체 Bold"/>
+                <a:cs typeface="KoPubWorld돋움체 Bold"/>
+              </a:rPr>
+              <a:t> </a:t>
+            </a:r>
+            <a:r>
+              <a:rPr sz="1800" b="1" dirty="0" err="1">
+                <a:solidFill>
+                  <a:srgbClr val="191877"/>
+                </a:solidFill>
+                <a:latin typeface="KoPubWorld돋움체 Bold"/>
+                <a:ea typeface="KoPubWorld돋움체 Bold"/>
+                <a:cs typeface="KoPubWorld돋움체 Bold"/>
+              </a:rPr>
+              <a:t>포트폴리오</a:t>
+            </a:r>
+            <a:r>
+              <a:rPr sz="1800" b="1" dirty="0">
+                <a:solidFill>
+                  <a:srgbClr val="191877"/>
+                </a:solidFill>
+                <a:latin typeface="KoPubWorld돋움체 Bold"/>
+                <a:ea typeface="KoPubWorld돋움체 Bold"/>
+                <a:cs typeface="KoPubWorld돋움체 Bold"/>
+              </a:rPr>
+              <a:t> </a:t>
+            </a:r>
+            <a:r>
+              <a:rPr sz="1800" b="1" dirty="0" err="1">
+                <a:solidFill>
+                  <a:srgbClr val="191877"/>
+                </a:solidFill>
+                <a:latin typeface="KoPubWorld돋움체 Bold"/>
+                <a:ea typeface="KoPubWorld돋움체 Bold"/>
+                <a:cs typeface="KoPubWorld돋움체 Bold"/>
+              </a:rPr>
+              <a:t>솔루션</a:t>
+            </a:r>
+            <a:endParaRPr sz="1800" b="1" dirty="0">
+              <a:solidFill>
+                <a:srgbClr val="191877"/>
+              </a:solidFill>
+              <a:latin typeface="KoPubWorld돋움체 Bold"/>
+              <a:ea typeface="KoPubWorld돋움체 Bold"/>
+              <a:cs typeface="KoPubWorld돋움체 Bold"/>
+            </a:endParaRPr>
           </a:p>
         </p:txBody>
       </p:sp>
@@ -17176,7 +17368,7 @@
               </a:lnSpc>
             </a:pPr>
             <a:r>
-              <a:rPr sz="1100" b="0">
+              <a:rPr sz="1100" b="0" dirty="0">
                 <a:solidFill>
                   <a:srgbClr val="595959"/>
                 </a:solidFill>
@@ -17184,8 +17376,71 @@
                 <a:ea typeface="KoPubWorld돋움체 Medium"/>
                 <a:cs typeface="KoPubWorld돋움체 Medium"/>
               </a:rPr>
-              <a:t>KCGI 자산운용 | 뉴스핌 월간</a:t>
-            </a:r>
+              <a:t>KCGI </a:t>
+            </a:r>
+            <a:r>
+              <a:rPr sz="1100" b="0" dirty="0" err="1">
+                <a:solidFill>
+                  <a:srgbClr val="595959"/>
+                </a:solidFill>
+                <a:latin typeface="KoPubWorld돋움체 Medium"/>
+                <a:ea typeface="KoPubWorld돋움체 Medium"/>
+                <a:cs typeface="KoPubWorld돋움체 Medium"/>
+              </a:rPr>
+              <a:t>자산운용</a:t>
+            </a:r>
+            <a:r>
+              <a:rPr sz="1100" b="0" dirty="0">
+                <a:solidFill>
+                  <a:srgbClr val="595959"/>
+                </a:solidFill>
+                <a:latin typeface="KoPubWorld돋움체 Medium"/>
+                <a:ea typeface="KoPubWorld돋움체 Medium"/>
+                <a:cs typeface="KoPubWorld돋움체 Medium"/>
+              </a:rPr>
+              <a:t> | </a:t>
+            </a:r>
+            <a:r>
+              <a:rPr sz="1100" b="0" dirty="0" err="1">
+                <a:solidFill>
+                  <a:srgbClr val="595959"/>
+                </a:solidFill>
+                <a:latin typeface="KoPubWorld돋움체 Medium"/>
+                <a:ea typeface="KoPubWorld돋움체 Medium"/>
+                <a:cs typeface="KoPubWorld돋움체 Medium"/>
+              </a:rPr>
+              <a:t>뉴스핌</a:t>
+            </a:r>
+            <a:r>
+              <a:rPr sz="1100" b="0" dirty="0">
+                <a:solidFill>
+                  <a:srgbClr val="595959"/>
+                </a:solidFill>
+                <a:latin typeface="KoPubWorld돋움체 Medium"/>
+                <a:ea typeface="KoPubWorld돋움체 Medium"/>
+                <a:cs typeface="KoPubWorld돋움체 Medium"/>
+              </a:rPr>
+              <a:t> </a:t>
+            </a:r>
+            <a:r>
+              <a:rPr sz="1100" b="0" dirty="0" err="1">
+                <a:solidFill>
+                  <a:srgbClr val="595959"/>
+                </a:solidFill>
+                <a:latin typeface="KoPubWorld돋움체 Medium"/>
+                <a:ea typeface="KoPubWorld돋움체 Medium"/>
+                <a:cs typeface="KoPubWorld돋움체 Medium"/>
+              </a:rPr>
+              <a:t>월간</a:t>
+            </a:r>
+            <a:endParaRPr sz="1100" b="0" dirty="0">
+              <a:solidFill>
+                <a:srgbClr val="595959"/>
+              </a:solidFill>
+              <a:latin typeface="KoPubWorld돋움체 Medium"/>
+              <a:ea typeface="KoPubWorld돋움체 Medium"/>
+              <a:cs typeface="KoPubWorld돋움체 Medium"/>
+            </a:endParaRPr>
           </a:p>
         </p:txBody>
       </p:sp>
@@ -17197,8 +17452,8 @@
         </p:nvSpPr>
         <p:spPr>
           <a:xfrm>
-            <a:off x="10058400" y="530352"/>
-            <a:ext cx="2011680" cy="320040"/>
+            <a:off x="10058400" y="561106"/>
+            <a:ext cx="2011680" cy="258532"/>
           </a:xfrm>
           <a:prstGeom prst="rect">
             <a:avLst/>
@@ -17217,7 +17472,7 @@
               </a:lnSpc>
             </a:pPr>
             <a:r>
-              <a:rPr sz="1200" b="1" dirty="0">
+              <a:rPr sz="1200" b="1" dirty="0" smtClean="0">
                 <a:solidFill>
                   <a:srgbClr val="191877"/>
                 </a:solidFill>
@@ -17225,7 +17480,40 @@
                 <a:ea typeface="KoPubWorld돋움체 Bold"/>
                 <a:cs typeface="KoPubWorld돋움체 Bold"/>
               </a:rPr>
-              <a:t>2026.05  ·  </a:t>
+              <a:t>2026.0</a:t>
+            </a:r>
+            <a:r>
+              <a:rPr lang="en-US" sz="1200" b="1" dirty="0" smtClean="0">
+                <a:solidFill>
+                  <a:srgbClr val="191877"/>
+                </a:solidFill>
+                <a:latin typeface="KoPubWorld돋움체 Bold"/>
+                <a:ea typeface="KoPubWorld돋움체 Bold"/>
+                <a:cs typeface="KoPubWorld돋움체 Bold"/>
+              </a:rPr>
+              <a:t>6</a:t>
+            </a:r>
+            <a:r>
+              <a:rPr sz="1200" b="1" dirty="0" smtClean="0">
+                <a:solidFill>
+                  <a:srgbClr val="191877"/>
+                </a:solidFill>
+                <a:latin typeface="KoPubWorld돋움체 Bold"/>
+                <a:ea typeface="KoPubWorld돋움체 Bold"/>
+                <a:cs typeface="KoPubWorld돋움체 Bold"/>
+              </a:rPr>
+              <a:t>  </a:t>
+            </a:r>
+            <a:r>
+              <a:rPr sz="1200" b="1" dirty="0">
+                <a:solidFill>
+                  <a:srgbClr val="191877"/>
+                </a:solidFill>
+                <a:latin typeface="KoPubWorld돋움체 Bold"/>
+                <a:ea typeface="KoPubWorld돋움체 Bold"/>
+                <a:cs typeface="KoPubWorld돋움체 Bold"/>
+              </a:rPr>
+              <a:t>·  </a:t>
             </a:r>
             <a:r>
               <a:rPr sz="1200" b="1" dirty="0" smtClean="0">
@@ -21148,8 +21436,8 @@
         </p:nvSpPr>
         <p:spPr>
           <a:xfrm>
-            <a:off x="10058400" y="530352"/>
-            <a:ext cx="2011680" cy="320040"/>
+            <a:off x="10058400" y="561106"/>
+            <a:ext cx="2011680" cy="258532"/>
           </a:xfrm>
           <a:prstGeom prst="rect">
             <a:avLst/>
@@ -21168,7 +21456,7 @@
               </a:lnSpc>
             </a:pPr>
             <a:r>
-              <a:rPr sz="1200" b="1">
+              <a:rPr sz="1200" b="1" dirty="0" smtClean="0">
                 <a:solidFill>
                   <a:srgbClr val="191877"/>
                 </a:solidFill>
@@ -21176,7 +21464,40 @@
                 <a:ea typeface="KoPubWorld돋움체 Bold"/>
                 <a:cs typeface="KoPubWorld돋움체 Bold"/>
               </a:rPr>
-              <a:t>2026.05  ·  3/14</a:t>
+              <a:t>2026.0</a:t>
+            </a:r>
+            <a:r>
+              <a:rPr lang="en-US" sz="1200" b="1" dirty="0" smtClean="0">
+                <a:solidFill>
+                  <a:srgbClr val="191877"/>
+                </a:solidFill>
+                <a:latin typeface="KoPubWorld돋움체 Bold"/>
+                <a:ea typeface="KoPubWorld돋움체 Bold"/>
+                <a:cs typeface="KoPubWorld돋움체 Bold"/>
+              </a:rPr>
+              <a:t>6</a:t>
+            </a:r>
+            <a:r>
+              <a:rPr sz="1200" b="1" dirty="0" smtClean="0">
+                <a:solidFill>
+                  <a:srgbClr val="191877"/>
+                </a:solidFill>
+                <a:latin typeface="KoPubWorld돋움체 Bold"/>
+                <a:ea typeface="KoPubWorld돋움체 Bold"/>
+                <a:cs typeface="KoPubWorld돋움체 Bold"/>
+              </a:rPr>
+              <a:t>  </a:t>
+            </a:r>
+            <a:r>
+              <a:rPr sz="1200" b="1" dirty="0">
+                <a:solidFill>
+                  <a:srgbClr val="191877"/>
+                </a:solidFill>
+                <a:latin typeface="KoPubWorld돋움체 Bold"/>
+                <a:ea typeface="KoPubWorld돋움체 Bold"/>
+                <a:cs typeface="KoPubWorld돋움체 Bold"/>
+              </a:rPr>
+              <a:t>·  3/14</a:t>
             </a:r>
           </a:p>
         </p:txBody>
@@ -25659,8 +25980,8 @@
         </p:nvSpPr>
         <p:spPr>
           <a:xfrm>
-            <a:off x="10058400" y="530352"/>
-            <a:ext cx="2011680" cy="320040"/>
+            <a:off x="10058400" y="561106"/>
+            <a:ext cx="2011680" cy="258532"/>
           </a:xfrm>
           <a:prstGeom prst="rect">
             <a:avLst/>
@@ -25679,7 +26000,7 @@
               </a:lnSpc>
             </a:pPr>
             <a:r>
-              <a:rPr sz="1200" b="1">
+              <a:rPr sz="1200" b="1" dirty="0" smtClean="0">
                 <a:solidFill>
                   <a:srgbClr val="191877"/>
                 </a:solidFill>
@@ -25687,8 +26008,71 @@
                 <a:ea typeface="KoPubWorld돋움체 Bold"/>
                 <a:cs typeface="KoPubWorld돋움체 Bold"/>
               </a:rPr>
-              <a:t>2026.05  ·  5/14</a:t>
-            </a:r>
+              <a:t>2026.0</a:t>
+            </a:r>
+            <a:r>
+              <a:rPr lang="en-US" sz="1200" b="1" dirty="0" smtClean="0">
+                <a:solidFill>
+                  <a:srgbClr val="191877"/>
+                </a:solidFill>
+                <a:latin typeface="KoPubWorld돋움체 Bold"/>
+                <a:ea typeface="KoPubWorld돋움체 Bold"/>
+                <a:cs typeface="KoPubWorld돋움체 Bold"/>
+              </a:rPr>
+              <a:t>6</a:t>
+            </a:r>
+            <a:r>
+              <a:rPr sz="1200" b="1" dirty="0" smtClean="0">
+                <a:solidFill>
+                  <a:srgbClr val="191877"/>
+                </a:solidFill>
+                <a:latin typeface="KoPubWorld돋움체 Bold"/>
+                <a:ea typeface="KoPubWorld돋움체 Bold"/>
+                <a:cs typeface="KoPubWorld돋움체 Bold"/>
+              </a:rPr>
+              <a:t>  </a:t>
+            </a:r>
+            <a:r>
+              <a:rPr sz="1200" b="1" dirty="0">
+                <a:solidFill>
+                  <a:srgbClr val="191877"/>
+                </a:solidFill>
+                <a:latin typeface="KoPubWorld돋움체 Bold"/>
+                <a:ea typeface="KoPubWorld돋움체 Bold"/>
+                <a:cs typeface="KoPubWorld돋움체 Bold"/>
+              </a:rPr>
+              <a:t>·  </a:t>
+            </a:r>
+            <a:r>
+              <a:rPr lang="en-US" sz="1200" b="1" dirty="0">
+                <a:solidFill>
+                  <a:srgbClr val="191877"/>
+                </a:solidFill>
+                <a:latin typeface="KoPubWorld돋움체 Bold"/>
+                <a:ea typeface="KoPubWorld돋움체 Bold"/>
+                <a:cs typeface="KoPubWorld돋움체 Bold"/>
+              </a:rPr>
+              <a:t>5</a:t>
+            </a:r>
+            <a:r>
+              <a:rPr sz="1200" b="1" dirty="0" smtClean="0">
+                <a:solidFill>
+                  <a:srgbClr val="191877"/>
+                </a:solidFill>
+                <a:latin typeface="KoPubWorld돋움체 Bold"/>
+                <a:ea typeface="KoPubWorld돋움체 Bold"/>
+                <a:cs typeface="KoPubWorld돋움체 Bold"/>
+              </a:rPr>
+              <a:t>/14</a:t>
+            </a:r>
+            <a:endParaRPr sz="1200" b="1" dirty="0">
+              <a:solidFill>
+                <a:srgbClr val="191877"/>
+              </a:solidFill>
+              <a:latin typeface="KoPubWorld돋움체 Bold"/>
+              <a:ea typeface="KoPubWorld돋움체 Bold"/>
+              <a:cs typeface="KoPubWorld돋움체 Bold"/>
+            </a:endParaRPr>
           </a:p>
         </p:txBody>
       </p:sp>
@@ -28728,8 +29112,8 @@
         </p:nvSpPr>
         <p:spPr>
           <a:xfrm>
-            <a:off x="10058400" y="530352"/>
-            <a:ext cx="2011680" cy="320040"/>
+            <a:off x="10058400" y="561106"/>
+            <a:ext cx="2011680" cy="258532"/>
           </a:xfrm>
           <a:prstGeom prst="rect">
             <a:avLst/>
@@ -28748,7 +29132,7 @@
               </a:lnSpc>
             </a:pPr>
             <a:r>
-              <a:rPr sz="1200" b="1">
+              <a:rPr sz="1200" b="1" dirty="0" smtClean="0">
                 <a:solidFill>
                   <a:srgbClr val="191877"/>
                 </a:solidFill>
@@ -28756,7 +29140,40 @@
                 <a:ea typeface="KoPubWorld돋움체 Bold"/>
                 <a:cs typeface="KoPubWorld돋움체 Bold"/>
               </a:rPr>
-              <a:t>2026.05  ·  6/14</a:t>
+              <a:t>2026.0</a:t>
+            </a:r>
+            <a:r>
+              <a:rPr lang="en-US" sz="1200" b="1" dirty="0" smtClean="0">
+                <a:solidFill>
+                  <a:srgbClr val="191877"/>
+                </a:solidFill>
+                <a:latin typeface="KoPubWorld돋움체 Bold"/>
+                <a:ea typeface="KoPubWorld돋움체 Bold"/>
+                <a:cs typeface="KoPubWorld돋움체 Bold"/>
+              </a:rPr>
+              <a:t>6</a:t>
+            </a:r>
+            <a:r>
+              <a:rPr sz="1200" b="1" dirty="0" smtClean="0">
+                <a:solidFill>
+                  <a:srgbClr val="191877"/>
+                </a:solidFill>
+                <a:latin typeface="KoPubWorld돋움체 Bold"/>
+                <a:ea typeface="KoPubWorld돋움체 Bold"/>
+                <a:cs typeface="KoPubWorld돋움체 Bold"/>
+              </a:rPr>
+              <a:t>  </a:t>
+            </a:r>
+            <a:r>
+              <a:rPr sz="1200" b="1" dirty="0">
+                <a:solidFill>
+                  <a:srgbClr val="191877"/>
+                </a:solidFill>
+                <a:latin typeface="KoPubWorld돋움체 Bold"/>
+                <a:ea typeface="KoPubWorld돋움체 Bold"/>
+                <a:cs typeface="KoPubWorld돋움체 Bold"/>
+              </a:rPr>
+              <a:t>·  6/14</a:t>
             </a:r>
           </a:p>
         </p:txBody>
@@ -31405,8 +31822,8 @@
         </p:nvSpPr>
         <p:spPr>
           <a:xfrm>
-            <a:off x="10058400" y="530352"/>
-            <a:ext cx="2011680" cy="320040"/>
+            <a:off x="10058400" y="561106"/>
+            <a:ext cx="2011680" cy="258532"/>
           </a:xfrm>
           <a:prstGeom prst="rect">
             <a:avLst/>
@@ -31425,7 +31842,7 @@
               </a:lnSpc>
             </a:pPr>
             <a:r>
-              <a:rPr sz="1200" b="1">
+              <a:rPr sz="1200" b="1" dirty="0" smtClean="0">
                 <a:solidFill>
                   <a:srgbClr val="191877"/>
                 </a:solidFill>
@@ -31433,7 +31850,40 @@
                 <a:ea typeface="KoPubWorld돋움체 Bold"/>
                 <a:cs typeface="KoPubWorld돋움체 Bold"/>
               </a:rPr>
-              <a:t>2026.05  ·  7/14</a:t>
+              <a:t>2026.0</a:t>
+            </a:r>
+            <a:r>
+              <a:rPr lang="en-US" sz="1200" b="1" dirty="0" smtClean="0">
+                <a:solidFill>
+                  <a:srgbClr val="191877"/>
+                </a:solidFill>
+                <a:latin typeface="KoPubWorld돋움체 Bold"/>
+                <a:ea typeface="KoPubWorld돋움체 Bold"/>
+                <a:cs typeface="KoPubWorld돋움체 Bold"/>
+              </a:rPr>
+              <a:t>6</a:t>
+            </a:r>
+            <a:r>
+              <a:rPr sz="1200" b="1" dirty="0" smtClean="0">
+                <a:solidFill>
+                  <a:srgbClr val="191877"/>
+                </a:solidFill>
+                <a:latin typeface="KoPubWorld돋움체 Bold"/>
+                <a:ea typeface="KoPubWorld돋움체 Bold"/>
+                <a:cs typeface="KoPubWorld돋움체 Bold"/>
+              </a:rPr>
+              <a:t>  </a:t>
+            </a:r>
+            <a:r>
+              <a:rPr sz="1200" b="1" dirty="0">
+                <a:solidFill>
+                  <a:srgbClr val="191877"/>
+                </a:solidFill>
+                <a:latin typeface="KoPubWorld돋움체 Bold"/>
+                <a:ea typeface="KoPubWorld돋움체 Bold"/>
+                <a:cs typeface="KoPubWorld돋움체 Bold"/>
+              </a:rPr>
+              <a:t>·  7/14</a:t>
             </a:r>
           </a:p>
         </p:txBody>
@@ -35220,8 +35670,8 @@
         </p:nvSpPr>
         <p:spPr>
           <a:xfrm>
-            <a:off x="10058400" y="530352"/>
-            <a:ext cx="2011680" cy="320040"/>
+            <a:off x="10058400" y="561106"/>
+            <a:ext cx="2011680" cy="258532"/>
           </a:xfrm>
           <a:prstGeom prst="rect">
             <a:avLst/>
@@ -35240,7 +35690,7 @@
               </a:lnSpc>
             </a:pPr>
             <a:r>
-              <a:rPr sz="1200" b="1">
+              <a:rPr sz="1200" b="1" dirty="0" smtClean="0">
                 <a:solidFill>
                   <a:srgbClr val="191877"/>
                 </a:solidFill>
@@ -35248,7 +35698,40 @@
                 <a:ea typeface="KoPubWorld돋움체 Bold"/>
                 <a:cs typeface="KoPubWorld돋움체 Bold"/>
               </a:rPr>
-              <a:t>2026.05  ·  8/14</a:t>
+              <a:t>2026.0</a:t>
+            </a:r>
+            <a:r>
+              <a:rPr lang="en-US" sz="1200" b="1" dirty="0" smtClean="0">
+                <a:solidFill>
+                  <a:srgbClr val="191877"/>
+                </a:solidFill>
+                <a:latin typeface="KoPubWorld돋움체 Bold"/>
+                <a:ea typeface="KoPubWorld돋움체 Bold"/>
+                <a:cs typeface="KoPubWorld돋움체 Bold"/>
+              </a:rPr>
+              <a:t>6</a:t>
+            </a:r>
+            <a:r>
+              <a:rPr sz="1200" b="1" dirty="0" smtClean="0">
+                <a:solidFill>
+                  <a:srgbClr val="191877"/>
+                </a:solidFill>
+                <a:latin typeface="KoPubWorld돋움체 Bold"/>
+                <a:ea typeface="KoPubWorld돋움체 Bold"/>
+                <a:cs typeface="KoPubWorld돋움체 Bold"/>
+              </a:rPr>
+              <a:t>  </a:t>
+            </a:r>
+            <a:r>
+              <a:rPr sz="1200" b="1" dirty="0">
+                <a:solidFill>
+                  <a:srgbClr val="191877"/>
+                </a:solidFill>
+                <a:latin typeface="KoPubWorld돋움체 Bold"/>
+                <a:ea typeface="KoPubWorld돋움체 Bold"/>
+                <a:cs typeface="KoPubWorld돋움체 Bold"/>
+              </a:rPr>
+              <a:t>·  8/14</a:t>
             </a:r>
           </a:p>
         </p:txBody>
@@ -37698,8 +38181,8 @@
         </p:nvSpPr>
         <p:spPr>
           <a:xfrm>
-            <a:off x="10058400" y="530352"/>
-            <a:ext cx="2011680" cy="320040"/>
+            <a:off x="10058400" y="561106"/>
+            <a:ext cx="2011680" cy="258532"/>
           </a:xfrm>
           <a:prstGeom prst="rect">
             <a:avLst/>
@@ -37718,7 +38201,7 @@
               </a:lnSpc>
             </a:pPr>
             <a:r>
-              <a:rPr sz="1200" b="1">
+              <a:rPr sz="1200" b="1" dirty="0" smtClean="0">
                 <a:solidFill>
                   <a:srgbClr val="191877"/>
                 </a:solidFill>
@@ -37726,7 +38209,40 @@
                 <a:ea typeface="KoPubWorld돋움체 Bold"/>
                 <a:cs typeface="KoPubWorld돋움체 Bold"/>
               </a:rPr>
-              <a:t>2026.05  ·  9/14</a:t>
+              <a:t>2026.0</a:t>
+            </a:r>
+            <a:r>
+              <a:rPr lang="en-US" sz="1200" b="1" dirty="0" smtClean="0">
+                <a:solidFill>
+                  <a:srgbClr val="191877"/>
+                </a:solidFill>
+                <a:latin typeface="KoPubWorld돋움체 Bold"/>
+                <a:ea typeface="KoPubWorld돋움체 Bold"/>
+                <a:cs typeface="KoPubWorld돋움체 Bold"/>
+              </a:rPr>
+              <a:t>6</a:t>
+            </a:r>
+            <a:r>
+              <a:rPr sz="1200" b="1" dirty="0" smtClean="0">
+                <a:solidFill>
+                  <a:srgbClr val="191877"/>
+                </a:solidFill>
+                <a:latin typeface="KoPubWorld돋움체 Bold"/>
+                <a:ea typeface="KoPubWorld돋움체 Bold"/>
+                <a:cs typeface="KoPubWorld돋움체 Bold"/>
+              </a:rPr>
+              <a:t>  </a:t>
+            </a:r>
+            <a:r>
+              <a:rPr sz="1200" b="1" dirty="0">
+                <a:solidFill>
+                  <a:srgbClr val="191877"/>
+                </a:solidFill>
+                <a:latin typeface="KoPubWorld돋움체 Bold"/>
+                <a:ea typeface="KoPubWorld돋움체 Bold"/>
+                <a:cs typeface="KoPubWorld돋움체 Bold"/>
+              </a:rPr>
+              <a:t>·  9/14</a:t>
             </a:r>
           </a:p>
         </p:txBody>
@@ -40448,8 +40964,8 @@
         </p:nvSpPr>
         <p:spPr>
           <a:xfrm>
-            <a:off x="10058400" y="530352"/>
-            <a:ext cx="2011680" cy="320040"/>
+            <a:off x="10058400" y="561106"/>
+            <a:ext cx="2011680" cy="258532"/>
           </a:xfrm>
           <a:prstGeom prst="rect">
             <a:avLst/>
@@ -40468,7 +40984,7 @@
               </a:lnSpc>
             </a:pPr>
             <a:r>
-              <a:rPr sz="1200" b="1">
+              <a:rPr sz="1200" b="1" dirty="0" smtClean="0">
                 <a:solidFill>
                   <a:srgbClr val="191877"/>
                 </a:solidFill>
@@ -40476,7 +40992,40 @@
                 <a:ea typeface="KoPubWorld돋움체 Bold"/>
                 <a:cs typeface="KoPubWorld돋움체 Bold"/>
               </a:rPr>
-              <a:t>2026.05  ·  10/14</a:t>
+              <a:t>2026.0</a:t>
+            </a:r>
+            <a:r>
+              <a:rPr lang="en-US" sz="1200" b="1" dirty="0" smtClean="0">
+                <a:solidFill>
+                  <a:srgbClr val="191877"/>
+                </a:solidFill>
+                <a:latin typeface="KoPubWorld돋움체 Bold"/>
+                <a:ea typeface="KoPubWorld돋움체 Bold"/>
+                <a:cs typeface="KoPubWorld돋움체 Bold"/>
+              </a:rPr>
+              <a:t>6</a:t>
+            </a:r>
+            <a:r>
+              <a:rPr sz="1200" b="1" dirty="0" smtClean="0">
+                <a:solidFill>
+                  <a:srgbClr val="191877"/>
+                </a:solidFill>
+                <a:latin typeface="KoPubWorld돋움체 Bold"/>
+                <a:ea typeface="KoPubWorld돋움체 Bold"/>
+                <a:cs typeface="KoPubWorld돋움체 Bold"/>
+              </a:rPr>
+              <a:t>  </a:t>
+            </a:r>
+            <a:r>
+              <a:rPr sz="1200" b="1" dirty="0">
+                <a:solidFill>
+                  <a:srgbClr val="191877"/>
+                </a:solidFill>
+                <a:latin typeface="KoPubWorld돋움체 Bold"/>
+                <a:ea typeface="KoPubWorld돋움체 Bold"/>
+                <a:cs typeface="KoPubWorld돋움체 Bold"/>
+              </a:rPr>
+              <a:t>·  10/14</a:t>
             </a:r>
           </a:p>
         </p:txBody>
